--- a/docs/MeAI_broadcast_FP_2026.10_owner_v3_images.pptx
+++ b/docs/MeAI_broadcast_FP_2026.10_owner_v3_images.pptx
@@ -804,7 +804,7 @@
               <a:t>[예상 17:35–19:05 · 90초] 동의 상태 · 알림톡
 진행: 세 줄을 위에서 아래로 짚기. 둘째 줄에서 '김민수 고객처럼'은 10장 캡처의 빨간 테두리 버튼을 떠올리게 하고, 버튼 → 팝업 화살표를 따라 손으로 짚는다. 전화 한 마디는 실제 통화하듯. '15분 안팎'으로 읽기. 다음 장(13장 · 동의 전 연락 준비)은 '그럼 동의를 받기 전에는…'으로 이어진다.
 맞춤대화를 열기 전에 하나만 보세요. 사전조회 동의입니다. 맞춤대화는 보장 내역을 읽기 때문에 동의가 먼저입니다. 상태는 세 가지뿐입니다.
-첫째, 남은 날이 보이면 유효합니다. 동의일부터 1년 동안 보입니다. 바로 맞춤대화를 시작하세요.
+첫째, 남은 날이 보이면 유효합니다. 동의일부터 3년 동안 보입니다. 바로 맞춤대화를 시작하세요.
 둘째, 김민수 고객처럼 '동의 필요'가 보이면 [사전조회동의 요청하기]를 누르고 휴대폰 번호를 넣으세요. 고객에게 알림톡이 갑니다. MeAI 홈 [고객 동의]에서도 보낼 수 있습니다. 전화로는 이렇게 말씀하세요. '보장을 정확히 보고 말씀드리려면 동의가 필요해요. 알림톡으로 금방 끝나요.' 동의하면 15분 안팎에 반영됩니다.
 셋째, 오늘 철회한 고객은 회색입니다. 새 동의 없이는 볼 수 없으니, 우회하지 말고 동의부터입니다.
 MeAI 홈 '사전조회 동의 필요' 숫자가 이번 달 알림톡 보낼 고객입니다.</a:t>
@@ -2401,7 +2401,7 @@
 [개발자 설명 · 질문 2 어떻게 만들었나요 · 약 60초]
 끝으로, 영업가족에게 꼭 전하고 싶은 한 가지는 무엇인가요?
 [개발자 설명 · 질문 3 꼭 전할 한 가지 · 약 30초]
-정리하면, 매일 밤 계산해 다음 날 아홉 분을 이유 한 문장과 함께 보여 줍니다. 대상은 사전조회 동의일로부터 1년 이내 고객입니다. 추천은 지시가 아니라 이유가 있는 고객입니다. 그룹에서 직접 골라도 됩니다. 발굴은 시스템이, 설득은 사람이 합니다.
+정리하면, 매일 밤 계산해 다음 날 아홉 분을 이유 한 문장과 함께 보여 줍니다. 대상은 사전조회 동의일로부터 3년 이내 고객입니다. 추천은 지시가 아니라 이유가 있는 고객입니다. 그룹에서 직접 골라도 됩니다. 발굴은 시스템이, 설득은 사람이 합니다.
 【발표자 노트 — 송출·낭독하지 않음】
 ■ 방송 전 두 분과 확인할 것
 1) 선정 기준: 오늘의 추천 고객 9명을 고르는 기준을 방송에서 어디까지 말할지, 기준이 확정됐는지.
@@ -2417,7 +2417,7 @@
 - "점수는 화면에 표시하지 않고, 왜 지금 이 고객인지를 공략 포인트 한 문장으로 전달합니다." (같은 글)
 - "고객 데이터와 추천 결과는 익일에 반영됩니다." (MeAI 홈 오른쪽 위 안내)
 - "그룹 분류와 고객 정보는 익일에 반영됩니다." (고객찾기 안내)
-- "MeAI 홈에 노출되는 고객은 사전조회 동의일로부터 1년 이내의 고객입니다." (MeAI 홈 범례)
+- "MeAI 홈에 노출되는 고객은 사전조회 동의일로부터 3년 이내의 고객입니다." (MeAI 홈 범례)
 - "한 고객은 보유·가망·이관 중 하나로만 분류됩니다." (MeAI 홈 범례)
 - "카드 칩은 우선순위 순으로 노출됩니다." (태그 분류표)
 - "고객 타겟팅이 끝난 상태로 맞춤대화 화면에 진입합니다." (고객찾기 오른쪽 안내)
